--- a/public/documents/business-simulation/round-4/section-d/section-d-round4-u1-vs-u2-insights-debrief.pptx
+++ b/public/documents/business-simulation/round-4/section-d/section-d-round4-u1-vs-u2-insights-debrief.pptx
@@ -2471,6 +2471,10 @@
           </p:nvPr>
         </p:nvSpPr>
         <p:spPr/>
+        <p:txBody>
+          <a:bodyPr/>
+          <a:p/>
+        </p:txBody>
       </p:sp>
       <p:sp>
         <p:nvSpPr>
@@ -2487,10 +2491,6 @@
           <a:bodyPr/>
           <a:lstStyle/>
           <a:p>
-            <a:r>
-              <a:rPr lang="en-US" dirty="0"/>
-              <a:t>Frame the comparison: universes are separate competitive markets, not one combined league table.</a:t>
-            </a:r>
             <a:endParaRPr lang="en-US" dirty="0"/>
           </a:p>
         </p:txBody>
@@ -2510,10 +2510,6 @@
           <a:bodyPr/>
           <a:lstStyle/>
           <a:p>
-            <a:fld id="{F7021451-1387-4CA6-816F-3879F97B5CBC}" type="slidenum">
-              <a:rPr lang="en-US"/>
-              <a:t>1</a:t>
-            </a:fld>
             <a:endParaRPr lang="en-US"/>
           </a:p>
         </p:txBody>
@@ -2559,6 +2555,10 @@
           </p:nvPr>
         </p:nvSpPr>
         <p:spPr/>
+        <p:txBody>
+          <a:bodyPr/>
+          <a:p/>
+        </p:txBody>
       </p:sp>
       <p:sp>
         <p:nvSpPr>
@@ -2575,10 +2575,6 @@
           <a:bodyPr/>
           <a:lstStyle/>
           <a:p>
-            <a:r>
-              <a:rPr lang="en-US" dirty="0"/>
-              <a:t>Show that “leader” and “profit engine” differ across universes.</a:t>
-            </a:r>
             <a:endParaRPr lang="en-US" dirty="0"/>
           </a:p>
         </p:txBody>
@@ -2598,10 +2594,6 @@
           <a:bodyPr/>
           <a:lstStyle/>
           <a:p>
-            <a:fld id="{F7021451-1387-4CA6-816F-3879F97B5CBC}" type="slidenum">
-              <a:rPr lang="en-US"/>
-              <a:t>10</a:t>
-            </a:fld>
             <a:endParaRPr lang="en-US"/>
           </a:p>
         </p:txBody>
@@ -2647,6 +2639,10 @@
           </p:nvPr>
         </p:nvSpPr>
         <p:spPr/>
+        <p:txBody>
+          <a:bodyPr/>
+          <a:p/>
+        </p:txBody>
       </p:sp>
       <p:sp>
         <p:nvSpPr>
@@ -2663,10 +2659,6 @@
           <a:bodyPr/>
           <a:lstStyle/>
           <a:p>
-            <a:r>
-              <a:rPr lang="en-US" dirty="0"/>
-              <a:t>Use as cross-learning discussion.</a:t>
-            </a:r>
             <a:endParaRPr lang="en-US" dirty="0"/>
           </a:p>
         </p:txBody>
@@ -2686,10 +2678,6 @@
           <a:bodyPr/>
           <a:lstStyle/>
           <a:p>
-            <a:fld id="{F7021451-1387-4CA6-816F-3879F97B5CBC}" type="slidenum">
-              <a:rPr lang="en-US"/>
-              <a:t>11</a:t>
-            </a:fld>
             <a:endParaRPr lang="en-US"/>
           </a:p>
         </p:txBody>
@@ -2735,6 +2723,10 @@
           </p:nvPr>
         </p:nvSpPr>
         <p:spPr/>
+        <p:txBody>
+          <a:bodyPr/>
+          <a:p/>
+        </p:txBody>
       </p:sp>
       <p:sp>
         <p:nvSpPr>
@@ -2751,10 +2743,6 @@
           <a:bodyPr/>
           <a:lstStyle/>
           <a:p>
-            <a:r>
-              <a:rPr lang="en-US" dirty="0"/>
-              <a:t>Discuss HallaBol as high-profit/low-TSR paradox.</a:t>
-            </a:r>
             <a:endParaRPr lang="en-US" dirty="0"/>
           </a:p>
         </p:txBody>
@@ -2774,10 +2762,6 @@
           <a:bodyPr/>
           <a:lstStyle/>
           <a:p>
-            <a:fld id="{F7021451-1387-4CA6-816F-3879F97B5CBC}" type="slidenum">
-              <a:rPr lang="en-US"/>
-              <a:t>12</a:t>
-            </a:fld>
             <a:endParaRPr lang="en-US"/>
           </a:p>
         </p:txBody>
@@ -2823,6 +2807,10 @@
           </p:nvPr>
         </p:nvSpPr>
         <p:spPr/>
+        <p:txBody>
+          <a:bodyPr/>
+          <a:p/>
+        </p:txBody>
       </p:sp>
       <p:sp>
         <p:nvSpPr>
@@ -2839,10 +2827,6 @@
           <a:bodyPr/>
           <a:lstStyle/>
           <a:p>
-            <a:r>
-              <a:rPr lang="en-US" dirty="0"/>
-              <a:t>Close cross-universe deck by requiring one rule from each universe.</a:t>
-            </a:r>
             <a:endParaRPr lang="en-US" dirty="0"/>
           </a:p>
         </p:txBody>
@@ -2862,10 +2846,6 @@
           <a:bodyPr/>
           <a:lstStyle/>
           <a:p>
-            <a:fld id="{F7021451-1387-4CA6-816F-3879F97B5CBC}" type="slidenum">
-              <a:rPr lang="en-US"/>
-              <a:t>13</a:t>
-            </a:fld>
             <a:endParaRPr lang="en-US"/>
           </a:p>
         </p:txBody>
@@ -2911,6 +2891,10 @@
           </p:nvPr>
         </p:nvSpPr>
         <p:spPr/>
+        <p:txBody>
+          <a:bodyPr/>
+          <a:p/>
+        </p:txBody>
       </p:sp>
       <p:sp>
         <p:nvSpPr>
@@ -2927,10 +2911,6 @@
           <a:bodyPr/>
           <a:lstStyle/>
           <a:p>
-            <a:r>
-              <a:rPr lang="en-US" dirty="0"/>
-              <a:t>End with two-minute reflections by universe.</a:t>
-            </a:r>
             <a:endParaRPr lang="en-US" dirty="0"/>
           </a:p>
         </p:txBody>
@@ -2950,10 +2930,6 @@
           <a:bodyPr/>
           <a:lstStyle/>
           <a:p>
-            <a:fld id="{F7021451-1387-4CA6-816F-3879F97B5CBC}" type="slidenum">
-              <a:rPr lang="en-US"/>
-              <a:t>14</a:t>
-            </a:fld>
             <a:endParaRPr lang="en-US"/>
           </a:p>
         </p:txBody>
@@ -2999,6 +2975,10 @@
           </p:nvPr>
         </p:nvSpPr>
         <p:spPr/>
+        <p:txBody>
+          <a:bodyPr/>
+          <a:p/>
+        </p:txBody>
       </p:sp>
       <p:sp>
         <p:nvSpPr>
@@ -3015,10 +2995,6 @@
           <a:bodyPr/>
           <a:lstStyle/>
           <a:p>
-            <a:r>
-              <a:rPr lang="en-US" dirty="0"/>
-              <a:t>Warn against cross-universe rank inflation.</a:t>
-            </a:r>
             <a:endParaRPr lang="en-US" dirty="0"/>
           </a:p>
         </p:txBody>
@@ -3038,10 +3014,6 @@
           <a:bodyPr/>
           <a:lstStyle/>
           <a:p>
-            <a:fld id="{F7021451-1387-4CA6-816F-3879F97B5CBC}" type="slidenum">
-              <a:rPr lang="en-US"/>
-              <a:t>2</a:t>
-            </a:fld>
             <a:endParaRPr lang="en-US"/>
           </a:p>
         </p:txBody>
@@ -3087,6 +3059,10 @@
           </p:nvPr>
         </p:nvSpPr>
         <p:spPr/>
+        <p:txBody>
+          <a:bodyPr/>
+          <a:p/>
+        </p:txBody>
       </p:sp>
       <p:sp>
         <p:nvSpPr>
@@ -3103,10 +3079,6 @@
           <a:bodyPr/>
           <a:lstStyle/>
           <a:p>
-            <a:r>
-              <a:rPr lang="en-US" dirty="0"/>
-              <a:t>Ask students to separate size from quality.</a:t>
-            </a:r>
             <a:endParaRPr lang="en-US" dirty="0"/>
           </a:p>
         </p:txBody>
@@ -3126,10 +3098,6 @@
           <a:bodyPr/>
           <a:lstStyle/>
           <a:p>
-            <a:fld id="{F7021451-1387-4CA6-816F-3879F97B5CBC}" type="slidenum">
-              <a:rPr lang="en-US"/>
-              <a:t>3</a:t>
-            </a:fld>
             <a:endParaRPr lang="en-US"/>
           </a:p>
         </p:txBody>
@@ -3175,6 +3143,10 @@
           </p:nvPr>
         </p:nvSpPr>
         <p:spPr/>
+        <p:txBody>
+          <a:bodyPr/>
+          <a:p/>
+        </p:txBody>
       </p:sp>
       <p:sp>
         <p:nvSpPr>
@@ -3191,10 +3163,6 @@
           <a:bodyPr/>
           <a:lstStyle/>
           <a:p>
-            <a:r>
-              <a:rPr lang="en-US" dirty="0"/>
-              <a:t>Compare Red Rangers in U1 with Grey in U2.</a:t>
-            </a:r>
             <a:endParaRPr lang="en-US" dirty="0"/>
           </a:p>
         </p:txBody>
@@ -3214,10 +3182,6 @@
           <a:bodyPr/>
           <a:lstStyle/>
           <a:p>
-            <a:fld id="{F7021451-1387-4CA6-816F-3879F97B5CBC}" type="slidenum">
-              <a:rPr lang="en-US"/>
-              <a:t>4</a:t>
-            </a:fld>
             <a:endParaRPr lang="en-US"/>
           </a:p>
         </p:txBody>
@@ -3263,6 +3227,10 @@
           </p:nvPr>
         </p:nvSpPr>
         <p:spPr/>
+        <p:txBody>
+          <a:bodyPr/>
+          <a:p/>
+        </p:txBody>
       </p:sp>
       <p:sp>
         <p:nvSpPr>
@@ -3279,10 +3247,6 @@
           <a:bodyPr/>
           <a:lstStyle/>
           <a:p>
-            <a:r>
-              <a:rPr lang="en-US" dirty="0"/>
-              <a:t/>
-            </a:r>
             <a:endParaRPr lang="en-US" dirty="0"/>
           </a:p>
         </p:txBody>
@@ -3302,10 +3266,6 @@
           <a:bodyPr/>
           <a:lstStyle/>
           <a:p>
-            <a:fld id="{F7021451-1387-4CA6-816F-3879F97B5CBC}" type="slidenum">
-              <a:rPr lang="en-US"/>
-              <a:t>5</a:t>
-            </a:fld>
             <a:endParaRPr lang="en-US"/>
           </a:p>
         </p:txBody>
@@ -3351,6 +3311,10 @@
           </p:nvPr>
         </p:nvSpPr>
         <p:spPr/>
+        <p:txBody>
+          <a:bodyPr/>
+          <a:p/>
+        </p:txBody>
       </p:sp>
       <p:sp>
         <p:nvSpPr>
@@ -3367,10 +3331,6 @@
           <a:bodyPr/>
           <a:lstStyle/>
           <a:p>
-            <a:r>
-              <a:rPr lang="en-US" dirty="0"/>
-              <a:t/>
-            </a:r>
             <a:endParaRPr lang="en-US" dirty="0"/>
           </a:p>
         </p:txBody>
@@ -3390,10 +3350,6 @@
           <a:bodyPr/>
           <a:lstStyle/>
           <a:p>
-            <a:fld id="{F7021451-1387-4CA6-816F-3879F97B5CBC}" type="slidenum">
-              <a:rPr lang="en-US"/>
-              <a:t>6</a:t>
-            </a:fld>
             <a:endParaRPr lang="en-US"/>
           </a:p>
         </p:txBody>
@@ -3439,6 +3395,10 @@
           </p:nvPr>
         </p:nvSpPr>
         <p:spPr/>
+        <p:txBody>
+          <a:bodyPr/>
+          <a:p/>
+        </p:txBody>
       </p:sp>
       <p:sp>
         <p:nvSpPr>
@@ -3455,10 +3415,6 @@
           <a:bodyPr/>
           <a:lstStyle/>
           <a:p>
-            <a:r>
-              <a:rPr lang="en-US" dirty="0"/>
-              <a:t/>
-            </a:r>
             <a:endParaRPr lang="en-US" dirty="0"/>
           </a:p>
         </p:txBody>
@@ -3478,10 +3434,6 @@
           <a:bodyPr/>
           <a:lstStyle/>
           <a:p>
-            <a:fld id="{F7021451-1387-4CA6-816F-3879F97B5CBC}" type="slidenum">
-              <a:rPr lang="en-US"/>
-              <a:t>7</a:t>
-            </a:fld>
             <a:endParaRPr lang="en-US"/>
           </a:p>
         </p:txBody>
@@ -3527,6 +3479,10 @@
           </p:nvPr>
         </p:nvSpPr>
         <p:spPr/>
+        <p:txBody>
+          <a:bodyPr/>
+          <a:p/>
+        </p:txBody>
       </p:sp>
       <p:sp>
         <p:nvSpPr>
@@ -3543,10 +3499,6 @@
           <a:bodyPr/>
           <a:lstStyle/>
           <a:p>
-            <a:r>
-              <a:rPr lang="en-US" dirty="0"/>
-              <a:t/>
-            </a:r>
             <a:endParaRPr lang="en-US" dirty="0"/>
           </a:p>
         </p:txBody>
@@ -3566,10 +3518,6 @@
           <a:bodyPr/>
           <a:lstStyle/>
           <a:p>
-            <a:fld id="{F7021451-1387-4CA6-816F-3879F97B5CBC}" type="slidenum">
-              <a:rPr lang="en-US"/>
-              <a:t>8</a:t>
-            </a:fld>
             <a:endParaRPr lang="en-US"/>
           </a:p>
         </p:txBody>
@@ -3615,6 +3563,10 @@
           </p:nvPr>
         </p:nvSpPr>
         <p:spPr/>
+        <p:txBody>
+          <a:bodyPr/>
+          <a:p/>
+        </p:txBody>
       </p:sp>
       <p:sp>
         <p:nvSpPr>
@@ -3631,10 +3583,6 @@
           <a:bodyPr/>
           <a:lstStyle/>
           <a:p>
-            <a:r>
-              <a:rPr lang="en-US" dirty="0"/>
-              <a:t/>
-            </a:r>
             <a:endParaRPr lang="en-US" dirty="0"/>
           </a:p>
         </p:txBody>
@@ -3654,10 +3602,6 @@
           <a:bodyPr/>
           <a:lstStyle/>
           <a:p>
-            <a:fld id="{F7021451-1387-4CA6-816F-3879F97B5CBC}" type="slidenum">
-              <a:rPr lang="en-US"/>
-              <a:t>9</a:t>
-            </a:fld>
             <a:endParaRPr lang="en-US"/>
           </a:p>
         </p:txBody>
@@ -4030,6 +3974,10 @@
             <a:prstDash val="solid"/>
           </a:ln>
         </p:spPr>
+        <p:txBody>
+          <a:bodyPr/>
+          <a:p/>
+        </p:txBody>
       </p:sp>
       <p:sp>
         <p:nvSpPr>
@@ -4174,6 +4122,10 @@
             <a:prstDash val="solid"/>
           </a:ln>
         </p:spPr>
+        <p:txBody>
+          <a:bodyPr/>
+          <a:p/>
+        </p:txBody>
       </p:sp>
       <p:sp>
         <p:nvSpPr>
@@ -4281,6 +4233,10 @@
             <a:prstDash val="solid"/>
           </a:ln>
         </p:spPr>
+        <p:txBody>
+          <a:bodyPr/>
+          <a:p/>
+        </p:txBody>
       </p:sp>
       <p:sp>
         <p:nvSpPr>
@@ -4308,6 +4264,10 @@
             <a:prstDash val="solid"/>
           </a:ln>
         </p:spPr>
+        <p:txBody>
+          <a:bodyPr/>
+          <a:p/>
+        </p:txBody>
       </p:sp>
       <p:sp>
         <p:nvSpPr>
@@ -4374,6 +4334,10 @@
             <a:prstDash val="solid"/>
           </a:ln>
         </p:spPr>
+        <p:txBody>
+          <a:bodyPr/>
+          <a:p/>
+        </p:txBody>
       </p:sp>
       <p:sp>
         <p:nvSpPr>
@@ -4440,6 +4404,10 @@
             <a:prstDash val="solid"/>
           </a:ln>
         </p:spPr>
+        <p:txBody>
+          <a:bodyPr/>
+          <a:p/>
+        </p:txBody>
       </p:sp>
       <p:sp>
         <p:nvSpPr>
@@ -4506,6 +4474,10 @@
             <a:prstDash val="solid"/>
           </a:ln>
         </p:spPr>
+        <p:txBody>
+          <a:bodyPr/>
+          <a:p/>
+        </p:txBody>
       </p:sp>
       <p:sp>
         <p:nvSpPr>
@@ -4572,6 +4544,10 @@
             <a:prstDash val="solid"/>
           </a:ln>
         </p:spPr>
+        <p:txBody>
+          <a:bodyPr/>
+          <a:p/>
+        </p:txBody>
       </p:sp>
       <p:sp>
         <p:nvSpPr>
@@ -4638,6 +4614,10 @@
             <a:prstDash val="solid"/>
           </a:ln>
         </p:spPr>
+        <p:txBody>
+          <a:bodyPr/>
+          <a:p/>
+        </p:txBody>
       </p:sp>
       <p:sp>
         <p:nvSpPr>
@@ -4773,6 +4753,10 @@
             <a:prstDash val="solid"/>
           </a:ln>
         </p:spPr>
+        <p:txBody>
+          <a:bodyPr/>
+          <a:p/>
+        </p:txBody>
       </p:sp>
       <p:sp>
         <p:nvSpPr>
@@ -4874,6 +4858,10 @@
             <a:prstDash val="solid"/>
           </a:ln>
         </p:spPr>
+        <p:txBody>
+          <a:bodyPr/>
+          <a:p/>
+        </p:txBody>
       </p:sp>
       <p:sp>
         <p:nvSpPr>
@@ -6038,6 +6026,10 @@
             <a:prstDash val="solid"/>
           </a:ln>
         </p:spPr>
+        <p:txBody>
+          <a:bodyPr/>
+          <a:p/>
+        </p:txBody>
       </p:sp>
       <p:sp>
         <p:nvSpPr>
@@ -6272,6 +6264,10 @@
             <a:prstDash val="solid"/>
           </a:ln>
         </p:spPr>
+        <p:txBody>
+          <a:bodyPr/>
+          <a:p/>
+        </p:txBody>
       </p:sp>
       <p:sp>
         <p:nvSpPr>
@@ -6373,6 +6369,10 @@
             <a:prstDash val="solid"/>
           </a:ln>
         </p:spPr>
+        <p:txBody>
+          <a:bodyPr/>
+          <a:p/>
+        </p:txBody>
       </p:sp>
       <p:sp>
         <p:nvSpPr>
@@ -6558,6 +6558,10 @@
             <a:prstDash val="solid"/>
           </a:ln>
         </p:spPr>
+        <p:txBody>
+          <a:bodyPr/>
+          <a:p/>
+        </p:txBody>
       </p:sp>
       <p:sp>
         <p:nvSpPr>
@@ -6792,6 +6796,10 @@
             <a:prstDash val="solid"/>
           </a:ln>
         </p:spPr>
+        <p:txBody>
+          <a:bodyPr/>
+          <a:p/>
+        </p:txBody>
       </p:sp>
       <p:sp>
         <p:nvSpPr>
@@ -6893,6 +6901,10 @@
             <a:prstDash val="solid"/>
           </a:ln>
         </p:spPr>
+        <p:txBody>
+          <a:bodyPr/>
+          <a:p/>
+        </p:txBody>
       </p:sp>
       <p:sp>
         <p:nvSpPr>
@@ -7078,6 +7090,10 @@
             <a:prstDash val="solid"/>
           </a:ln>
         </p:spPr>
+        <p:txBody>
+          <a:bodyPr/>
+          <a:p/>
+        </p:txBody>
       </p:sp>
       <p:sp>
         <p:nvSpPr>
@@ -7312,6 +7328,10 @@
             <a:prstDash val="solid"/>
           </a:ln>
         </p:spPr>
+        <p:txBody>
+          <a:bodyPr/>
+          <a:p/>
+        </p:txBody>
       </p:sp>
       <p:sp>
         <p:nvSpPr>
@@ -7413,6 +7433,10 @@
             <a:prstDash val="solid"/>
           </a:ln>
         </p:spPr>
+        <p:txBody>
+          <a:bodyPr/>
+          <a:p/>
+        </p:txBody>
       </p:sp>
       <p:sp>
         <p:nvSpPr>
@@ -8376,6 +8400,10 @@
             <a:prstDash val="solid"/>
           </a:ln>
         </p:spPr>
+        <p:txBody>
+          <a:bodyPr/>
+          <a:p/>
+        </p:txBody>
       </p:sp>
       <p:sp>
         <p:nvSpPr>
@@ -8530,6 +8558,10 @@
             <a:prstDash val="solid"/>
           </a:ln>
         </p:spPr>
+        <p:txBody>
+          <a:bodyPr/>
+          <a:p/>
+        </p:txBody>
       </p:sp>
       <p:sp>
         <p:nvSpPr>
@@ -8631,6 +8663,10 @@
             <a:prstDash val="solid"/>
           </a:ln>
         </p:spPr>
+        <p:txBody>
+          <a:bodyPr/>
+          <a:p/>
+        </p:txBody>
       </p:sp>
       <p:sp>
         <p:nvSpPr>
@@ -8841,6 +8877,10 @@
             <a:prstDash val="solid"/>
           </a:ln>
         </p:spPr>
+        <p:txBody>
+          <a:bodyPr/>
+          <a:p/>
+        </p:txBody>
       </p:sp>
       <p:sp>
         <p:nvSpPr>
@@ -8995,6 +9035,10 @@
             <a:prstDash val="solid"/>
           </a:ln>
         </p:spPr>
+        <p:txBody>
+          <a:bodyPr/>
+          <a:p/>
+        </p:txBody>
       </p:sp>
       <p:sp>
         <p:nvSpPr>
@@ -9096,6 +9140,10 @@
             <a:prstDash val="solid"/>
           </a:ln>
         </p:spPr>
+        <p:txBody>
+          <a:bodyPr/>
+          <a:p/>
+        </p:txBody>
       </p:sp>
       <p:sp>
         <p:nvSpPr>
@@ -9267,6 +9315,10 @@
             <a:prstDash val="solid"/>
           </a:ln>
         </p:spPr>
+        <p:txBody>
+          <a:bodyPr/>
+          <a:p/>
+        </p:txBody>
       </p:sp>
       <p:sp>
         <p:nvSpPr>
@@ -9501,6 +9553,10 @@
             <a:prstDash val="solid"/>
           </a:ln>
         </p:spPr>
+        <p:txBody>
+          <a:bodyPr/>
+          <a:p/>
+        </p:txBody>
       </p:sp>
       <p:sp>
         <p:nvSpPr>
@@ -9602,6 +9658,10 @@
             <a:prstDash val="solid"/>
           </a:ln>
         </p:spPr>
+        <p:txBody>
+          <a:bodyPr/>
+          <a:p/>
+        </p:txBody>
       </p:sp>
       <p:sp>
         <p:nvSpPr>
@@ -11712,6 +11772,10 @@
             <a:prstDash val="solid"/>
           </a:ln>
         </p:spPr>
+        <p:txBody>
+          <a:bodyPr/>
+          <a:p/>
+        </p:txBody>
       </p:sp>
       <p:sp>
         <p:nvSpPr>
@@ -11866,6 +11930,10 @@
             <a:prstDash val="solid"/>
           </a:ln>
         </p:spPr>
+        <p:txBody>
+          <a:bodyPr/>
+          <a:p/>
+        </p:txBody>
       </p:sp>
       <p:sp>
         <p:nvSpPr>
@@ -11967,6 +12035,10 @@
             <a:prstDash val="solid"/>
           </a:ln>
         </p:spPr>
+        <p:txBody>
+          <a:bodyPr/>
+          <a:p/>
+        </p:txBody>
       </p:sp>
       <p:sp>
         <p:nvSpPr>
@@ -14874,6 +14946,10 @@
             <a:prstDash val="solid"/>
           </a:ln>
         </p:spPr>
+        <p:txBody>
+          <a:bodyPr/>
+          <a:p/>
+        </p:txBody>
       </p:sp>
       <p:sp>
         <p:nvSpPr>
@@ -15028,6 +15104,10 @@
             <a:prstDash val="solid"/>
           </a:ln>
         </p:spPr>
+        <p:txBody>
+          <a:bodyPr/>
+          <a:p/>
+        </p:txBody>
       </p:sp>
       <p:sp>
         <p:nvSpPr>
@@ -15129,6 +15209,10 @@
             <a:prstDash val="solid"/>
           </a:ln>
         </p:spPr>
+        <p:txBody>
+          <a:bodyPr/>
+          <a:p/>
+        </p:txBody>
       </p:sp>
       <p:sp>
         <p:nvSpPr>
@@ -15234,6 +15318,10 @@
             <a:prstDash val="solid"/>
           </a:ln>
         </p:spPr>
+        <p:txBody>
+          <a:bodyPr/>
+          <a:p/>
+        </p:txBody>
       </p:sp>
       <p:sp>
         <p:nvSpPr>
@@ -15448,6 +15536,10 @@
             <a:prstDash val="solid"/>
           </a:ln>
         </p:spPr>
+        <p:txBody>
+          <a:bodyPr/>
+          <a:p/>
+        </p:txBody>
       </p:sp>
       <p:sp>
         <p:nvSpPr>
@@ -15682,6 +15774,10 @@
             <a:prstDash val="solid"/>
           </a:ln>
         </p:spPr>
+        <p:txBody>
+          <a:bodyPr/>
+          <a:p/>
+        </p:txBody>
       </p:sp>
       <p:sp>
         <p:nvSpPr>
@@ -15783,6 +15879,10 @@
             <a:prstDash val="solid"/>
           </a:ln>
         </p:spPr>
+        <p:txBody>
+          <a:bodyPr/>
+          <a:p/>
+        </p:txBody>
       </p:sp>
       <p:sp>
         <p:nvSpPr>
@@ -15888,6 +15988,10 @@
             <a:prstDash val="solid"/>
           </a:ln>
         </p:spPr>
+        <p:txBody>
+          <a:bodyPr/>
+          <a:p/>
+        </p:txBody>
       </p:sp>
       <p:sp>
         <p:nvSpPr>
@@ -16102,6 +16206,10 @@
             <a:prstDash val="solid"/>
           </a:ln>
         </p:spPr>
+        <p:txBody>
+          <a:bodyPr/>
+          <a:p/>
+        </p:txBody>
       </p:sp>
       <p:sp>
         <p:nvSpPr>
@@ -16336,6 +16444,10 @@
             <a:prstDash val="solid"/>
           </a:ln>
         </p:spPr>
+        <p:txBody>
+          <a:bodyPr/>
+          <a:p/>
+        </p:txBody>
       </p:sp>
       <p:sp>
         <p:nvSpPr>
@@ -16437,6 +16549,10 @@
             <a:prstDash val="solid"/>
           </a:ln>
         </p:spPr>
+        <p:txBody>
+          <a:bodyPr/>
+          <a:p/>
+        </p:txBody>
       </p:sp>
       <p:sp>
         <p:nvSpPr>
@@ -16542,6 +16658,10 @@
             <a:prstDash val="solid"/>
           </a:ln>
         </p:spPr>
+        <p:txBody>
+          <a:bodyPr/>
+          <a:p/>
+        </p:txBody>
       </p:sp>
       <p:sp>
         <p:nvSpPr>
@@ -16756,6 +16876,10 @@
             <a:prstDash val="solid"/>
           </a:ln>
         </p:spPr>
+        <p:txBody>
+          <a:bodyPr/>
+          <a:p/>
+        </p:txBody>
       </p:sp>
       <p:sp>
         <p:nvSpPr>
@@ -16990,6 +17114,10 @@
             <a:prstDash val="solid"/>
           </a:ln>
         </p:spPr>
+        <p:txBody>
+          <a:bodyPr/>
+          <a:p/>
+        </p:txBody>
       </p:sp>
       <p:sp>
         <p:nvSpPr>
@@ -17091,6 +17219,10 @@
             <a:prstDash val="solid"/>
           </a:ln>
         </p:spPr>
+        <p:txBody>
+          <a:bodyPr/>
+          <a:p/>
+        </p:txBody>
       </p:sp>
       <p:sp>
         <p:nvSpPr>
@@ -17196,6 +17328,10 @@
             <a:prstDash val="solid"/>
           </a:ln>
         </p:spPr>
+        <p:txBody>
+          <a:bodyPr/>
+          <a:p/>
+        </p:txBody>
       </p:sp>
       <p:sp>
         <p:nvSpPr>
@@ -17410,6 +17546,10 @@
             <a:prstDash val="solid"/>
           </a:ln>
         </p:spPr>
+        <p:txBody>
+          <a:bodyPr/>
+          <a:p/>
+        </p:txBody>
       </p:sp>
       <p:sp>
         <p:nvSpPr>
@@ -17644,6 +17784,10 @@
             <a:prstDash val="solid"/>
           </a:ln>
         </p:spPr>
+        <p:txBody>
+          <a:bodyPr/>
+          <a:p/>
+        </p:txBody>
       </p:sp>
       <p:sp>
         <p:nvSpPr>
@@ -17745,6 +17889,10 @@
             <a:prstDash val="solid"/>
           </a:ln>
         </p:spPr>
+        <p:txBody>
+          <a:bodyPr/>
+          <a:p/>
+        </p:txBody>
       </p:sp>
       <p:sp>
         <p:nvSpPr>
@@ -17850,6 +17998,10 @@
             <a:prstDash val="solid"/>
           </a:ln>
         </p:spPr>
+        <p:txBody>
+          <a:bodyPr/>
+          <a:p/>
+        </p:txBody>
       </p:sp>
       <p:sp>
         <p:nvSpPr>
@@ -18064,6 +18216,10 @@
             <a:prstDash val="solid"/>
           </a:ln>
         </p:spPr>
+        <p:txBody>
+          <a:bodyPr/>
+          <a:p/>
+        </p:txBody>
       </p:sp>
       <p:sp>
         <p:nvSpPr>
